--- a/catalog/samples/overview_map.pptx
+++ b/catalog/samples/overview_map.pptx
@@ -1272,7 +1272,7 @@
           </a:p>
           <a:p>
             <a:r>
-              <a:t>  "template_sha256": "d7b3b5d5f4e8841a251c3adc9c65ec41af773876237bdbf26153345d1180b1fb"</a:t>
+              <a:t>  "template_sha256": "c63ed0576d9478d3b08ca47b073d1b881ed1204b8a02db0c140617ef908eeb68"</a:t>
             </a:r>
           </a:p>
           <a:p>
